--- a/vta/slides/Module_5_Modes_of_Ventilation.pptx
+++ b/vta/slides/Module_5_Modes_of_Ventilation.pptx
@@ -1965,7 +1965,7 @@
                 <a:ea typeface="Calibri" pitchFamily="34" charset="-122"/>
                 <a:cs typeface="Calibri" pitchFamily="34" charset="-120"/>
               </a:rPr>
-              <a:t>Day 1 · Foundations</a:t>
+              <a:t>Foundations</a:t>
             </a:r>
             <a:pPr indent="0" marL="0">
               <a:buNone/>
@@ -1979,7 +1979,7 @@
                 <a:ea typeface="Calibri" pitchFamily="34" charset="-122"/>
                 <a:cs typeface="Calibri" pitchFamily="34" charset="-120"/>
               </a:rPr>
-              <a:t>   ·   ~60 min   ·   6 lessons</a:t>
+              <a:t>   ·   6 lessons</a:t>
             </a:r>
             <a:endParaRPr lang="en-US" sz="1300" dirty="0"/>
           </a:p>
@@ -3587,7 +3587,7 @@
         <p:spPr>
           <a:xfrm>
             <a:off x="548640" y="2148840"/>
-            <a:ext cx="10058400" cy="4114800"/>
+            <a:ext cx="10058400" cy="4160520"/>
           </a:xfrm>
           <a:prstGeom prst="rect">
             <a:avLst/>
@@ -3604,7 +3604,7 @@
                 <a:spcPct val="100000"/>
               </a:lnSpc>
               <a:spcAft>
-                <a:spcPts val="900"/>
+                <a:spcPts val="1000"/>
               </a:spcAft>
               <a:buSzPct val="100000"/>
               <a:buChar char="•"/>
@@ -3618,7 +3618,7 @@
                 <a:ea typeface="Calibri" pitchFamily="34" charset="-122"/>
                 <a:cs typeface="Calibri" pitchFamily="34" charset="-120"/>
               </a:rPr>
-              <a:t>Every vent breath guarantees one thing and lets the other float — like inflating a tire: pump to a set volume of air and the pressure lands where it…</a:t>
+              <a:t>Every vent breath guarantees one thing and lets the other float — like inflating a tire: pump to a set volume of air and the pressure lands where it lands, or pump to a set pressure and the volume lands where it lands.</a:t>
             </a:r>
             <a:endParaRPr lang="en-US" sz="1550" dirty="0"/>
           </a:p>
@@ -3628,7 +3628,7 @@
                 <a:spcPct val="100000"/>
               </a:lnSpc>
               <a:spcAft>
-                <a:spcPts val="900"/>
+                <a:spcPts val="1000"/>
               </a:spcAft>
               <a:buSzPct val="100000"/>
               <a:buChar char="•"/>
@@ -3642,7 +3642,7 @@
                 <a:ea typeface="Calibri" pitchFamily="34" charset="-122"/>
                 <a:cs typeface="Calibri" pitchFamily="34" charset="-120"/>
               </a:rPr>
-              <a:t>Volume-targeted (AC/VC): you set Vt — vent delivers it.</a:t>
+              <a:t>Volume-targeted (AC/VC): you set Vt — vent delivers it. PRESSURE varies with lung compliance. Most EMS default. Watch PIP / Pplat.</a:t>
             </a:r>
             <a:endParaRPr lang="en-US" sz="1550" dirty="0"/>
           </a:p>
@@ -3652,7 +3652,7 @@
                 <a:spcPct val="100000"/>
               </a:lnSpc>
               <a:spcAft>
-                <a:spcPts val="900"/>
+                <a:spcPts val="1000"/>
               </a:spcAft>
               <a:buSzPct val="100000"/>
               <a:buChar char="•"/>
@@ -3666,7 +3666,7 @@
                 <a:ea typeface="Calibri" pitchFamily="34" charset="-122"/>
                 <a:cs typeface="Calibri" pitchFamily="34" charset="-120"/>
               </a:rPr>
-              <a:t>Pressure-targeted (AC/PC): you set inspiratory pressure — vent delivers it.</a:t>
+              <a:t>Pressure-targeted (AC/PC): you set inspiratory pressure — vent delivers it. VOLUME varies. Pressure capped, so barotrauma risk lower. Watch delivered Vt.</a:t>
             </a:r>
             <a:endParaRPr lang="en-US" sz="1550" dirty="0"/>
           </a:p>
@@ -3676,7 +3676,7 @@
                 <a:spcPct val="100000"/>
               </a:lnSpc>
               <a:spcAft>
-                <a:spcPts val="900"/>
+                <a:spcPts val="1000"/>
               </a:spcAft>
               <a:buSzPct val="100000"/>
               <a:buChar char="•"/>
@@ -3690,7 +3690,7 @@
                 <a:ea typeface="Calibri" pitchFamily="34" charset="-122"/>
                 <a:cs typeface="Calibri" pitchFamily="34" charset="-120"/>
               </a:rPr>
-              <a:t>Trade-off: AC/VC gives predictable minute ventilation but variable pressure.</a:t>
+              <a:t>Trade-off: AC/VC gives predictable minute ventilation but variable pressure. AC/PC caps pressure but volume floats with stiffness.</a:t>
             </a:r>
             <a:endParaRPr lang="en-US" sz="1550" dirty="0"/>
           </a:p>
@@ -3854,7 +3854,7 @@
         <p:spPr>
           <a:xfrm>
             <a:off x="548640" y="2148840"/>
-            <a:ext cx="6309360" cy="4114800"/>
+            <a:ext cx="6309360" cy="4160520"/>
           </a:xfrm>
           <a:prstGeom prst="rect">
             <a:avLst/>
@@ -3871,7 +3871,7 @@
                 <a:spcPct val="100000"/>
               </a:lnSpc>
               <a:spcAft>
-                <a:spcPts val="900"/>
+                <a:spcPts val="1000"/>
               </a:spcAft>
               <a:buSzPct val="100000"/>
               <a:buChar char="•"/>
@@ -3885,7 +3885,7 @@
                 <a:ea typeface="Calibri" pitchFamily="34" charset="-122"/>
                 <a:cs typeface="Calibri" pitchFamily="34" charset="-120"/>
               </a:rPr>
-              <a:t>"Control" does NOT mean the patient is locked out.</a:t>
+              <a:t>"Control" does NOT mean the patient is locked out. In AC mode, the patient can trigger their own breaths above the set rate.</a:t>
             </a:r>
             <a:endParaRPr lang="en-US" sz="1550" dirty="0"/>
           </a:p>
@@ -3895,7 +3895,7 @@
                 <a:spcPct val="100000"/>
               </a:lnSpc>
               <a:spcAft>
-                <a:spcPts val="900"/>
+                <a:spcPts val="1000"/>
               </a:spcAft>
               <a:buSzPct val="100000"/>
               <a:buChar char="•"/>
@@ -3909,7 +3909,7 @@
                 <a:ea typeface="Calibri" pitchFamily="34" charset="-122"/>
                 <a:cs typeface="Calibri" pitchFamily="34" charset="-120"/>
               </a:rPr>
-              <a:t>AC guarantees a MINIMUM number of breaths per minute (set by RR).</a:t>
+              <a:t>AC guarantees a MINIMUM number of breaths per minute (set by RR). Patient-triggered breaths receive the full set Vt (or pressure) too. No "small supportive" breaths in pure AC.</a:t>
             </a:r>
             <a:endParaRPr lang="en-US" sz="1550" dirty="0"/>
           </a:p>
@@ -3919,7 +3919,7 @@
                 <a:spcPct val="100000"/>
               </a:lnSpc>
               <a:spcAft>
-                <a:spcPts val="900"/>
+                <a:spcPts val="1000"/>
               </a:spcAft>
               <a:buSzPct val="100000"/>
               <a:buChar char="•"/>
@@ -3933,7 +3933,7 @@
                 <a:ea typeface="Calibri" pitchFamily="34" charset="-122"/>
                 <a:cs typeface="Calibri" pitchFamily="34" charset="-120"/>
               </a:rPr>
-              <a:t>Historical note: the original mode was CMV (Continuous Mandatory Ventilation) — patient locked out completely.</a:t>
+              <a:t>Historical note: the original mode was CMV (Continuous Mandatory Ventilation) — patient locked out completely. AC came along to allow triggering, dramatically improving comfort.</a:t>
             </a:r>
             <a:endParaRPr lang="en-US" sz="1550" dirty="0"/>
           </a:p>
@@ -3943,7 +3943,7 @@
                 <a:spcPct val="100000"/>
               </a:lnSpc>
               <a:spcAft>
-                <a:spcPts val="900"/>
+                <a:spcPts val="1000"/>
               </a:spcAft>
               <a:buSzPct val="100000"/>
               <a:buChar char="•"/>
@@ -3957,7 +3957,7 @@
                 <a:ea typeface="Calibri" pitchFamily="34" charset="-122"/>
                 <a:cs typeface="Calibri" pitchFamily="34" charset="-120"/>
               </a:rPr>
-              <a:t>Tachypneic patient on AC can stack breaths and develop auto-PEEP.</a:t>
+              <a:t>Tachypneic patient on AC can stack breaths and develop auto-PEEP. Fix the cause of tachypnea (sedation, pain, hypoxia) — don't just lower the set rate.</a:t>
             </a:r>
             <a:endParaRPr lang="en-US" sz="1550" dirty="0"/>
           </a:p>
@@ -4266,7 +4266,7 @@
         <p:spPr>
           <a:xfrm>
             <a:off x="548640" y="2148840"/>
-            <a:ext cx="6309360" cy="4114800"/>
+            <a:ext cx="6309360" cy="4160520"/>
           </a:xfrm>
           <a:prstGeom prst="rect">
             <a:avLst/>
@@ -4283,7 +4283,7 @@
                 <a:spcPct val="100000"/>
               </a:lnSpc>
               <a:spcAft>
-                <a:spcPts val="900"/>
+                <a:spcPts val="1000"/>
               </a:spcAft>
               <a:buSzPct val="100000"/>
               <a:buChar char="•"/>
@@ -4297,7 +4297,7 @@
                 <a:ea typeface="Calibri" pitchFamily="34" charset="-122"/>
                 <a:cs typeface="Calibri" pitchFamily="34" charset="-120"/>
               </a:rPr>
-              <a:t>Synchronized Intermittent Mandatory Ventilation: vent delivers a SET rate of mandatory breaths.</a:t>
+              <a:t>Synchronized Intermittent Mandatory Ventilation: vent delivers a SET rate of mandatory breaths. Between mandatory breaths, the patient breathes spontaneously at any volume.</a:t>
             </a:r>
             <a:endParaRPr lang="en-US" sz="1550" dirty="0"/>
           </a:p>
@@ -4307,7 +4307,7 @@
                 <a:spcPct val="100000"/>
               </a:lnSpc>
               <a:spcAft>
-                <a:spcPts val="900"/>
+                <a:spcPts val="1000"/>
               </a:spcAft>
               <a:buSzPct val="100000"/>
               <a:buChar char="•"/>
@@ -4321,7 +4321,7 @@
                 <a:ea typeface="Calibri" pitchFamily="34" charset="-122"/>
                 <a:cs typeface="Calibri" pitchFamily="34" charset="-120"/>
               </a:rPr>
-              <a:t>Originally designed as a weaning mode — set rate decreased as the patient improved.</a:t>
+              <a:t>Originally designed as a weaning mode — set rate decreased as the patient improved. Intuitive but not supported by evidence.</a:t>
             </a:r>
             <a:endParaRPr lang="en-US" sz="1550" dirty="0"/>
           </a:p>
@@ -4331,7 +4331,7 @@
                 <a:spcPct val="100000"/>
               </a:lnSpc>
               <a:spcAft>
-                <a:spcPts val="900"/>
+                <a:spcPts val="1000"/>
               </a:spcAft>
               <a:buSzPct val="100000"/>
               <a:buChar char="•"/>
@@ -4345,7 +4345,7 @@
                 <a:ea typeface="Calibri" pitchFamily="34" charset="-122"/>
                 <a:cs typeface="Calibri" pitchFamily="34" charset="-120"/>
               </a:rPr>
-              <a:t>Esteban et al.</a:t>
+              <a:t>Esteban et al. (NEJM 1995) randomized weaning strategies. SIMV was the SLOWEST of four methods. Once-daily T-piece trials and PSV alone produced faster extubation. Most modern ICUs no longer use SIMV.</a:t>
             </a:r>
             <a:endParaRPr lang="en-US" sz="1550" dirty="0"/>
           </a:p>
@@ -4355,7 +4355,7 @@
                 <a:spcPct val="100000"/>
               </a:lnSpc>
               <a:spcAft>
-                <a:spcPts val="900"/>
+                <a:spcPts val="1000"/>
               </a:spcAft>
               <a:buSzPct val="100000"/>
               <a:buChar char="•"/>
@@ -4369,7 +4369,7 @@
                 <a:ea typeface="Calibri" pitchFamily="34" charset="-122"/>
                 <a:cs typeface="Calibri" pitchFamily="34" charset="-120"/>
               </a:rPr>
-              <a:t>Pressure Support (PSV): vent senses spontaneous effort and adds a fixed pressure (5–15 cmH₂O).</a:t>
+              <a:t>Pressure Support (PSV): vent senses spontaneous effort and adds a fixed pressure (5–15 cmH₂O). Compensates for ETT/circuit resistance (~5) or actively unloads the diaphragm (10–15).</a:t>
             </a:r>
             <a:endParaRPr lang="en-US" sz="1550" dirty="0"/>
           </a:p>
@@ -4678,7 +4678,7 @@
         <p:spPr>
           <a:xfrm>
             <a:off x="548640" y="2148840"/>
-            <a:ext cx="10058400" cy="4114800"/>
+            <a:ext cx="10058400" cy="4160520"/>
           </a:xfrm>
           <a:prstGeom prst="rect">
             <a:avLst/>
@@ -4695,7 +4695,7 @@
                 <a:spcPct val="100000"/>
               </a:lnSpc>
               <a:spcAft>
-                <a:spcPts val="900"/>
+                <a:spcPts val="1000"/>
               </a:spcAft>
               <a:buSzPct val="100000"/>
               <a:buChar char="•"/>
@@ -4709,7 +4709,7 @@
                 <a:ea typeface="Calibri" pitchFamily="34" charset="-122"/>
                 <a:cs typeface="Calibri" pitchFamily="34" charset="-120"/>
               </a:rPr>
-              <a:t>CPAP: ONE pressure throughout the breath.</a:t>
+              <a:t>CPAP: ONE pressure throughout the breath. Patient does all the work. Best for OXYGENATION problems (CHF, acute pulmonary edema).</a:t>
             </a:r>
             <a:endParaRPr lang="en-US" sz="1550" dirty="0"/>
           </a:p>
@@ -4719,7 +4719,7 @@
                 <a:spcPct val="100000"/>
               </a:lnSpc>
               <a:spcAft>
-                <a:spcPts val="900"/>
+                <a:spcPts val="1000"/>
               </a:spcAft>
               <a:buSzPct val="100000"/>
               <a:buChar char="•"/>
@@ -4733,7 +4733,7 @@
                 <a:ea typeface="Calibri" pitchFamily="34" charset="-122"/>
                 <a:cs typeface="Calibri" pitchFamily="34" charset="-120"/>
               </a:rPr>
-              <a:t>Bersten et al.</a:t>
+              <a:t>Bersten et al. (NEJM 1991): in cardiogenic pulmonary edema, CPAP eliminated intubation in the treated arm. Cochrane: NNT 4–7 to prevent intubation.</a:t>
             </a:r>
             <a:endParaRPr lang="en-US" sz="1550" dirty="0"/>
           </a:p>
@@ -4743,7 +4743,7 @@
                 <a:spcPct val="100000"/>
               </a:lnSpc>
               <a:spcAft>
-                <a:spcPts val="900"/>
+                <a:spcPts val="1000"/>
               </a:spcAft>
               <a:buSzPct val="100000"/>
               <a:buChar char="•"/>
@@ -4757,7 +4757,7 @@
                 <a:ea typeface="Calibri" pitchFamily="34" charset="-122"/>
                 <a:cs typeface="Calibri" pitchFamily="34" charset="-120"/>
               </a:rPr>
-              <a:t>BiPAP: TWO pressures (IPAP / EPAP).</a:t>
+              <a:t>BiPAP: TWO pressures (IPAP / EPAP). IPAP − EPAP = pressure support per breath. Best for VENTILATION problems (COPD with hypercapnia). Mechanism: EPAP overcomes auto-PEEP; IPAP unloads tired diaphragm.</a:t>
             </a:r>
             <a:endParaRPr lang="en-US" sz="1550" dirty="0"/>
           </a:p>
@@ -4767,7 +4767,7 @@
                 <a:spcPct val="100000"/>
               </a:lnSpc>
               <a:spcAft>
-                <a:spcPts val="900"/>
+                <a:spcPts val="1000"/>
               </a:spcAft>
               <a:buSzPct val="100000"/>
               <a:buChar char="•"/>
@@ -4781,7 +4781,7 @@
                 <a:ea typeface="Calibri" pitchFamily="34" charset="-122"/>
                 <a:cs typeface="Calibri" pitchFamily="34" charset="-120"/>
               </a:rPr>
-              <a:t>Brochard et al.</a:t>
+              <a:t>Brochard et al. (NEJM 1995): in COPD exacerbation with hypercapnia, BiPAP reduced intubation from 74% to 26% and mortality from 29% to 9%.</a:t>
             </a:r>
             <a:endParaRPr lang="en-US" sz="1550" dirty="0"/>
           </a:p>
@@ -4945,7 +4945,7 @@
         <p:spPr>
           <a:xfrm>
             <a:off x="548640" y="2148840"/>
-            <a:ext cx="10058400" cy="4114800"/>
+            <a:ext cx="10058400" cy="4160520"/>
           </a:xfrm>
           <a:prstGeom prst="rect">
             <a:avLst/>
@@ -4962,7 +4962,7 @@
                 <a:spcPct val="100000"/>
               </a:lnSpc>
               <a:spcAft>
-                <a:spcPts val="900"/>
+                <a:spcPts val="1000"/>
               </a:spcAft>
               <a:buSzPct val="100000"/>
               <a:buChar char="•"/>
@@ -4976,7 +4976,7 @@
                 <a:ea typeface="Calibri" pitchFamily="34" charset="-122"/>
                 <a:cs typeface="Calibri" pitchFamily="34" charset="-120"/>
               </a:rPr>
-              <a:t>Pressure-Regulated Volume Control: a HYBRID.</a:t>
+              <a:t>Pressure-Regulated Volume Control: a HYBRID. You set a Vt target; the vent delivers it using the LOWEST pressure required, measuring compliance breath-by-breath.</a:t>
             </a:r>
             <a:endParaRPr lang="en-US" sz="1550" dirty="0"/>
           </a:p>
@@ -4986,7 +4986,7 @@
                 <a:spcPct val="100000"/>
               </a:lnSpc>
               <a:spcAft>
-                <a:spcPts val="900"/>
+                <a:spcPts val="1000"/>
               </a:spcAft>
               <a:buSzPct val="100000"/>
               <a:buChar char="•"/>
@@ -5010,7 +5010,7 @@
                 <a:spcPct val="100000"/>
               </a:lnSpc>
               <a:spcAft>
-                <a:spcPts val="900"/>
+                <a:spcPts val="1000"/>
               </a:spcAft>
               <a:buSzPct val="100000"/>
               <a:buChar char="•"/>
@@ -5024,7 +5024,7 @@
                 <a:ea typeface="Calibri" pitchFamily="34" charset="-122"/>
                 <a:cs typeface="Calibri" pitchFamily="34" charset="-120"/>
               </a:rPr>
-              <a:t>The LTV 1200 does NOT natively offer PRVC.</a:t>
+              <a:t>The LTV 1200 does NOT natively offer PRVC. If you inherit a patient on PRVC from a sending facility, coordinate with the team, then switch to AC/VC (matching Vt and RR) or AC/PC.</a:t>
             </a:r>
             <a:endParaRPr lang="en-US" sz="1550" dirty="0"/>
           </a:p>
@@ -5034,7 +5034,7 @@
                 <a:spcPct val="100000"/>
               </a:lnSpc>
               <a:spcAft>
-                <a:spcPts val="900"/>
+                <a:spcPts val="1000"/>
               </a:spcAft>
               <a:buSzPct val="100000"/>
               <a:buChar char="•"/>
@@ -5048,7 +5048,7 @@
                 <a:ea typeface="Calibri" pitchFamily="34" charset="-122"/>
                 <a:cs typeface="Calibri" pitchFamily="34" charset="-120"/>
               </a:rPr>
-              <a:t>APRV (Airway Pressure Release Ventilation) — used in refractory ARDS.</a:t>
+              <a:t>APRV (Airway Pressure Release Ventilation) — used in refractory ARDS. NAVA (Neurally Adjusted Ventilatory Assist) — ICU-level synchrony. HFOV — once a rescue, OSCILLATE (NEJM 2013) showed harm.</a:t>
             </a:r>
             <a:endParaRPr lang="en-US" sz="1550" dirty="0"/>
           </a:p>
@@ -5212,7 +5212,7 @@
         <p:spPr>
           <a:xfrm>
             <a:off x="548640" y="2148840"/>
-            <a:ext cx="10058400" cy="4114800"/>
+            <a:ext cx="10058400" cy="4160520"/>
           </a:xfrm>
           <a:prstGeom prst="rect">
             <a:avLst/>
@@ -5229,7 +5229,7 @@
                 <a:spcPct val="100000"/>
               </a:lnSpc>
               <a:spcAft>
-                <a:spcPts val="900"/>
+                <a:spcPts val="1000"/>
               </a:spcAft>
               <a:buSzPct val="100000"/>
               <a:buChar char="•"/>
@@ -5243,7 +5243,7 @@
                 <a:ea typeface="Calibri" pitchFamily="34" charset="-122"/>
                 <a:cs typeface="Calibri" pitchFamily="34" charset="-120"/>
               </a:rPr>
-              <a:t>Patient-vent dyssynchrony is the patient and the machine fighting over who leads the breath — pushing and pulling at different moments, like two people…</a:t>
+              <a:t>Patient-vent dyssynchrony is the patient and the machine fighting over who leads the breath — pushing and pulling at different moments, like two people trying to row out of step.</a:t>
             </a:r>
             <a:endParaRPr lang="en-US" sz="1550" dirty="0"/>
           </a:p>
@@ -5253,7 +5253,7 @@
                 <a:spcPct val="100000"/>
               </a:lnSpc>
               <a:spcAft>
-                <a:spcPts val="900"/>
+                <a:spcPts val="1000"/>
               </a:spcAft>
               <a:buSzPct val="100000"/>
               <a:buChar char="•"/>
@@ -5267,7 +5267,7 @@
                 <a:ea typeface="Calibri" pitchFamily="34" charset="-122"/>
                 <a:cs typeface="Calibri" pitchFamily="34" charset="-120"/>
               </a:rPr>
-              <a:t>Trigger sensitivity controls how easily the patient initiates a breath.</a:t>
+              <a:t>Trigger sensitivity controls how easily the patient initiates a breath. Pressure trigger (−1 to −2 cmH₂O) is the common default. Flow trigger (1–3 L/min) is more responsive.</a:t>
             </a:r>
             <a:endParaRPr lang="en-US" sz="1550" dirty="0"/>
           </a:p>
@@ -5277,7 +5277,7 @@
                 <a:spcPct val="100000"/>
               </a:lnSpc>
               <a:spcAft>
-                <a:spcPts val="900"/>
+                <a:spcPts val="1000"/>
               </a:spcAft>
               <a:buSzPct val="100000"/>
               <a:buChar char="•"/>
@@ -5291,7 +5291,7 @@
                 <a:ea typeface="Calibri" pitchFamily="34" charset="-122"/>
                 <a:cs typeface="Calibri" pitchFamily="34" charset="-120"/>
               </a:rPr>
-              <a:t>Inspiratory rise time: how fast the pressure ramps up at the start of inspiration (pressure-targeted modes).</a:t>
+              <a:t>Inspiratory rise time: how fast the pressure ramps up at the start of inspiration (pressure-targeted modes). Faster rise (0.1–0.2 sec) feels powerful but can jolt awake patients.</a:t>
             </a:r>
             <a:endParaRPr lang="en-US" sz="1550" dirty="0"/>
           </a:p>
@@ -5301,7 +5301,7 @@
                 <a:spcPct val="100000"/>
               </a:lnSpc>
               <a:spcAft>
-                <a:spcPts val="900"/>
+                <a:spcPts val="1000"/>
               </a:spcAft>
               <a:buSzPct val="100000"/>
               <a:buChar char="•"/>
@@ -5839,7 +5839,9 @@
       </p:sp>
       <p:sp>
         <p:nvSpPr>
-          <p:cNvPr id="14" name="Text 12"/>
+          <p:cNvPr id="14" name="Text 12">
+            <a:hlinkClick r:id="rId1" tooltip="Open this module's simulator mission"/>
+          </p:cNvPr>
           <p:cNvSpPr/>
           <p:nvPr/>
         </p:nvSpPr>
@@ -5862,13 +5864,20 @@
               <a:buNone/>
             </a:pPr>
             <a:r>
-              <a:rPr lang="en-US" sz="1700" b="1" dirty="0">
+              <a:rPr lang="en-US" sz="1700" b="1" u="sng" dirty="0">
                 <a:solidFill>
                   <a:srgbClr val="FFFFFF"/>
                 </a:solidFill>
                 <a:latin typeface="Calibri" pitchFamily="34" charset="0"/>
                 <a:ea typeface="Calibri" pitchFamily="34" charset="-122"/>
                 <a:cs typeface="Calibri" pitchFamily="34" charset="-120"/>
+                <a:hlinkClick r:id="rId1" invalidUrl="" action="" tgtFrame="" tooltip="Open this module's simulator mission" history="1" highlightClick="0" endSnd="0">
+                  <a:extLst>
+                    <a:ext uri="{A12FA001-AC4F-418D-AE19-62706E023703}">
+                      <ahyp:hlinkClr xmlns:ahyp="http://schemas.microsoft.com/office/drawing/2018/hyperlinkcolor" val="tx"/>
+                    </a:ext>
+                  </a:extLst>
+                </a:hlinkClick>
               </a:rPr>
               <a:t>LTV 1200 Simulator</a:t>
             </a:r>
@@ -5901,13 +5910,20 @@
               <a:buNone/>
             </a:pPr>
             <a:r>
-              <a:rPr lang="en-US" sz="1250" dirty="0">
-                <a:solidFill>
-                  <a:srgbClr val="A9C2E0"/>
-                </a:solidFill>
-                <a:latin typeface="Calibri" pitchFamily="34" charset="0"/>
-                <a:ea typeface="Calibri" pitchFamily="34" charset="-122"/>
-                <a:cs typeface="Calibri" pitchFamily="34" charset="-120"/>
+              <a:rPr lang="en-US" sz="1250" u="sng" dirty="0">
+                <a:solidFill>
+                  <a:srgbClr val="7FB0E6"/>
+                </a:solidFill>
+                <a:latin typeface="Calibri" pitchFamily="34" charset="0"/>
+                <a:ea typeface="Calibri" pitchFamily="34" charset="-122"/>
+                <a:cs typeface="Calibri" pitchFamily="34" charset="-120"/>
+                <a:hlinkClick r:id="rId2" invalidUrl="" action="" tgtFrame="" tooltip="" history="1" highlightClick="0" endSnd="0">
+                  <a:extLst>
+                    <a:ext uri="{A12FA001-AC4F-418D-AE19-62706E023703}">
+                      <ahyp:hlinkClr xmlns:ahyp="http://schemas.microsoft.com/office/drawing/2018/hyperlinkcolor" val="tx"/>
+                    </a:ext>
+                  </a:extLst>
+                </a:hlinkClick>
               </a:rPr>
               <a:t>vent-ltv1200.html?scenario=niv-setup  —  Pick and set the right mode for an awake CHF patient — non-invasive CPAP before the…</a:t>
             </a:r>

--- a/vta/slides/Module_5_Modes_of_Ventilation.pptx
+++ b/vta/slides/Module_5_Modes_of_Ventilation.pptx
@@ -3587,7 +3587,7 @@
         <p:spPr>
           <a:xfrm>
             <a:off x="548640" y="2148840"/>
-            <a:ext cx="10058400" cy="4160520"/>
+            <a:ext cx="6309360" cy="4160520"/>
           </a:xfrm>
           <a:prstGeom prst="rect">
             <a:avLst/>
@@ -3696,6 +3696,30 @@
           </a:p>
         </p:txBody>
       </p:sp>
+      <p:pic>
+        <p:nvPicPr>
+          <p:cNvPr id="6" name="Image 0" descr="/tmp/claude-0/-home-user-amr-kc-protocols/883711fe-5eaa-500f-ae13-4d63d2ddcc7e/scratchpad/pngs/volpress.png">    </p:cNvPr>
+          <p:cNvPicPr>
+            <a:picLocks noChangeAspect="1"/>
+          </p:cNvPicPr>
+          <p:nvPr/>
+        </p:nvPicPr>
+        <p:blipFill>
+          <a:blip r:embed="rId1"/>
+          <a:stretch>
+            <a:fillRect/>
+          </a:stretch>
+        </p:blipFill>
+        <p:spPr>
+          <a:xfrm>
+            <a:off x="7040880" y="2822048"/>
+            <a:ext cx="4709160" cy="1945423"/>
+          </a:xfrm>
+          <a:prstGeom prst="rect">
+            <a:avLst/>
+          </a:prstGeom>
+        </p:spPr>
+      </p:pic>
     </p:spTree>
   </p:cSld>
   <p:clrMapOvr>
